--- a/M2/ppt/2.pptx
+++ b/M2/ppt/2.pptx
@@ -263,7 +263,7 @@
           <a:p>
             <a:fld id="{56D26834-5DB3-4451-BEB8-B76B7C0DCE76}" type="datetimeFigureOut">
               <a:rPr lang="ru-RU" smtClean="0"/>
-              <a:t>12.11.2024</a:t>
+              <a:t>13.05.2026</a:t>
             </a:fld>
             <a:endParaRPr lang="ru-RU"/>
           </a:p>
@@ -441,7 +441,7 @@
           <a:p>
             <a:fld id="{46072826-B294-4B60-AAC1-7EDD02A53457}" type="datetimeFigureOut">
               <a:rPr lang="ru-RU" smtClean="0"/>
-              <a:t>12.11.2024</a:t>
+              <a:t>13.05.2026</a:t>
             </a:fld>
             <a:endParaRPr lang="ru-RU"/>
           </a:p>
@@ -17981,7 +17981,7 @@
           <a:p>
             <a:fld id="{EF790F8C-5FB9-4EFE-BCC7-F735A3026FD8}" type="datetimeFigureOut">
               <a:rPr lang="ru-RU" smtClean="0"/>
-              <a:t>12.11.2024</a:t>
+              <a:t>13.05.2026</a:t>
             </a:fld>
             <a:endParaRPr lang="ru-RU"/>
           </a:p>
@@ -21821,7 +21821,7 @@
 </file>
 
 <file path=ppt/slides/slide1.xml><?xml version="1.0" encoding="utf-8"?>
-<p:sld xmlns:a="http://schemas.openxmlformats.org/drawingml/2006/main" xmlns:r="http://schemas.openxmlformats.org/officeDocument/2006/relationships" xmlns:p="http://schemas.openxmlformats.org/presentationml/2006/main">
+<p:sld xmlns:a="http://schemas.openxmlformats.org/drawingml/2006/main" xmlns:r="http://schemas.openxmlformats.org/officeDocument/2006/relationships" xmlns:p="http://schemas.openxmlformats.org/presentationml/2006/main" showMasterSp="0">
   <p:cSld>
     <p:spTree>
       <p:nvGrpSpPr>
@@ -21974,7 +21974,7 @@
 </file>
 
 <file path=ppt/slides/slide10.xml><?xml version="1.0" encoding="utf-8"?>
-<p:sld xmlns:a="http://schemas.openxmlformats.org/drawingml/2006/main" xmlns:r="http://schemas.openxmlformats.org/officeDocument/2006/relationships" xmlns:p="http://schemas.openxmlformats.org/presentationml/2006/main">
+<p:sld xmlns:a="http://schemas.openxmlformats.org/drawingml/2006/main" xmlns:r="http://schemas.openxmlformats.org/officeDocument/2006/relationships" xmlns:p="http://schemas.openxmlformats.org/presentationml/2006/main" showMasterSp="0">
   <p:cSld>
     <p:spTree>
       <p:nvGrpSpPr>
@@ -22481,7 +22481,7 @@
 </file>
 
 <file path=ppt/slides/slide13.xml><?xml version="1.0" encoding="utf-8"?>
-<p:sld xmlns:a="http://schemas.openxmlformats.org/drawingml/2006/main" xmlns:r="http://schemas.openxmlformats.org/officeDocument/2006/relationships" xmlns:p="http://schemas.openxmlformats.org/presentationml/2006/main">
+<p:sld xmlns:a="http://schemas.openxmlformats.org/drawingml/2006/main" xmlns:r="http://schemas.openxmlformats.org/officeDocument/2006/relationships" xmlns:p="http://schemas.openxmlformats.org/presentationml/2006/main" showMasterSp="0">
   <p:cSld>
     <p:spTree>
       <p:nvGrpSpPr>
@@ -22586,7 +22586,7 @@
 </file>
 
 <file path=ppt/slides/slide14.xml><?xml version="1.0" encoding="utf-8"?>
-<p:sld xmlns:a="http://schemas.openxmlformats.org/drawingml/2006/main" xmlns:r="http://schemas.openxmlformats.org/officeDocument/2006/relationships" xmlns:p="http://schemas.openxmlformats.org/presentationml/2006/main">
+<p:sld xmlns:a="http://schemas.openxmlformats.org/drawingml/2006/main" xmlns:r="http://schemas.openxmlformats.org/officeDocument/2006/relationships" xmlns:p="http://schemas.openxmlformats.org/presentationml/2006/main" showMasterSp="0">
   <p:cSld>
     <p:spTree>
       <p:nvGrpSpPr>
@@ -22872,7 +22872,7 @@
 </file>
 
 <file path=ppt/slides/slide2.xml><?xml version="1.0" encoding="utf-8"?>
-<p:sld xmlns:a="http://schemas.openxmlformats.org/drawingml/2006/main" xmlns:r="http://schemas.openxmlformats.org/officeDocument/2006/relationships" xmlns:p="http://schemas.openxmlformats.org/presentationml/2006/main">
+<p:sld xmlns:a="http://schemas.openxmlformats.org/drawingml/2006/main" xmlns:r="http://schemas.openxmlformats.org/officeDocument/2006/relationships" xmlns:p="http://schemas.openxmlformats.org/presentationml/2006/main" showMasterSp="0">
   <p:cSld>
     <p:spTree>
       <p:nvGrpSpPr>
@@ -23248,7 +23248,7 @@
 </file>
 
 <file path=ppt/slides/slide3.xml><?xml version="1.0" encoding="utf-8"?>
-<p:sld xmlns:a="http://schemas.openxmlformats.org/drawingml/2006/main" xmlns:r="http://schemas.openxmlformats.org/officeDocument/2006/relationships" xmlns:p="http://schemas.openxmlformats.org/presentationml/2006/main">
+<p:sld xmlns:a="http://schemas.openxmlformats.org/drawingml/2006/main" xmlns:r="http://schemas.openxmlformats.org/officeDocument/2006/relationships" xmlns:p="http://schemas.openxmlformats.org/presentationml/2006/main" showMasterSp="0">
   <p:cSld>
     <p:spTree>
       <p:nvGrpSpPr>
@@ -23497,7 +23497,7 @@
 </file>
 
 <file path=ppt/slides/slide4.xml><?xml version="1.0" encoding="utf-8"?>
-<p:sld xmlns:a="http://schemas.openxmlformats.org/drawingml/2006/main" xmlns:r="http://schemas.openxmlformats.org/officeDocument/2006/relationships" xmlns:p="http://schemas.openxmlformats.org/presentationml/2006/main">
+<p:sld xmlns:a="http://schemas.openxmlformats.org/drawingml/2006/main" xmlns:r="http://schemas.openxmlformats.org/officeDocument/2006/relationships" xmlns:p="http://schemas.openxmlformats.org/presentationml/2006/main" showMasterSp="0">
   <p:cSld>
     <p:spTree>
       <p:nvGrpSpPr>
@@ -23776,7 +23776,7 @@
 </file>
 
 <file path=ppt/slides/slide5.xml><?xml version="1.0" encoding="utf-8"?>
-<p:sld xmlns:a="http://schemas.openxmlformats.org/drawingml/2006/main" xmlns:r="http://schemas.openxmlformats.org/officeDocument/2006/relationships" xmlns:p="http://schemas.openxmlformats.org/presentationml/2006/main">
+<p:sld xmlns:a="http://schemas.openxmlformats.org/drawingml/2006/main" xmlns:r="http://schemas.openxmlformats.org/officeDocument/2006/relationships" xmlns:p="http://schemas.openxmlformats.org/presentationml/2006/main" showMasterSp="0">
   <p:cSld>
     <p:spTree>
       <p:nvGrpSpPr>
@@ -24015,7 +24015,7 @@
 </file>
 
 <file path=ppt/slides/slide6.xml><?xml version="1.0" encoding="utf-8"?>
-<p:sld xmlns:a="http://schemas.openxmlformats.org/drawingml/2006/main" xmlns:r="http://schemas.openxmlformats.org/officeDocument/2006/relationships" xmlns:p="http://schemas.openxmlformats.org/presentationml/2006/main">
+<p:sld xmlns:a="http://schemas.openxmlformats.org/drawingml/2006/main" xmlns:r="http://schemas.openxmlformats.org/officeDocument/2006/relationships" xmlns:p="http://schemas.openxmlformats.org/presentationml/2006/main" showMasterSp="0">
   <p:cSld>
     <p:spTree>
       <p:nvGrpSpPr>
@@ -24327,7 +24327,7 @@
 </file>
 
 <file path=ppt/slides/slide7.xml><?xml version="1.0" encoding="utf-8"?>
-<p:sld xmlns:a="http://schemas.openxmlformats.org/drawingml/2006/main" xmlns:r="http://schemas.openxmlformats.org/officeDocument/2006/relationships" xmlns:p="http://schemas.openxmlformats.org/presentationml/2006/main">
+<p:sld xmlns:a="http://schemas.openxmlformats.org/drawingml/2006/main" xmlns:r="http://schemas.openxmlformats.org/officeDocument/2006/relationships" xmlns:p="http://schemas.openxmlformats.org/presentationml/2006/main" showMasterSp="0">
   <p:cSld>
     <p:spTree>
       <p:nvGrpSpPr>
@@ -24484,7 +24484,7 @@
 </file>
 
 <file path=ppt/slides/slide8.xml><?xml version="1.0" encoding="utf-8"?>
-<p:sld xmlns:a="http://schemas.openxmlformats.org/drawingml/2006/main" xmlns:r="http://schemas.openxmlformats.org/officeDocument/2006/relationships" xmlns:p="http://schemas.openxmlformats.org/presentationml/2006/main">
+<p:sld xmlns:a="http://schemas.openxmlformats.org/drawingml/2006/main" xmlns:r="http://schemas.openxmlformats.org/officeDocument/2006/relationships" xmlns:p="http://schemas.openxmlformats.org/presentationml/2006/main" showMasterSp="0">
   <p:cSld>
     <p:spTree>
       <p:nvGrpSpPr>
@@ -24624,7 +24624,7 @@
 </file>
 
 <file path=ppt/slides/slide9.xml><?xml version="1.0" encoding="utf-8"?>
-<p:sld xmlns:a="http://schemas.openxmlformats.org/drawingml/2006/main" xmlns:r="http://schemas.openxmlformats.org/officeDocument/2006/relationships" xmlns:p="http://schemas.openxmlformats.org/presentationml/2006/main">
+<p:sld xmlns:a="http://schemas.openxmlformats.org/drawingml/2006/main" xmlns:r="http://schemas.openxmlformats.org/officeDocument/2006/relationships" xmlns:p="http://schemas.openxmlformats.org/presentationml/2006/main" showMasterSp="0">
   <p:cSld>
     <p:spTree>
       <p:nvGrpSpPr>
